--- a/informes/Presentacion_Modelo_Arriendo_Club_Leones_Z144.pptx
+++ b/informes/Presentacion_Modelo_Arriendo_Club_Leones_Z144.pptx
@@ -1658,7 +1658,7 @@
     <p:bg>
       <p:bgPr>
         <a:solidFill>
-          <a:srgbClr val="241033"/>
+          <a:srgbClr val="001233"/>
         </a:solidFill>
       </p:bgPr>
     </p:bg>
@@ -1691,7 +1691,7 @@
             <a:avLst/>
           </a:prstGeom>
           <a:solidFill>
-            <a:srgbClr val="3A1959"/>
+            <a:srgbClr val="0047AB"/>
           </a:solidFill>
           <a:ln/>
         </p:spPr>
@@ -1711,7 +1711,7 @@
             <a:avLst/>
           </a:prstGeom>
           <a:solidFill>
-            <a:srgbClr val="4B1F6F"/>
+            <a:srgbClr val="00338D"/>
           </a:solidFill>
           <a:ln/>
         </p:spPr>
@@ -1743,7 +1743,7 @@
             <a:r>
               <a:rPr lang="en-US" sz="1500" b="1" spc="300" kern="0" dirty="0">
                 <a:solidFill>
-                  <a:srgbClr val="C89B3C"/>
+                  <a:srgbClr val="FDB913"/>
                 </a:solidFill>
                 <a:latin typeface="Calibri" pitchFamily="34" charset="0"/>
                 <a:ea typeface="Calibri" pitchFamily="34" charset="-122"/>
@@ -1821,7 +1821,7 @@
             <a:r>
               <a:rPr lang="en-US" sz="2200" dirty="0">
                 <a:solidFill>
-                  <a:srgbClr val="F6EFDE"/>
+                  <a:srgbClr val="FFF6DF"/>
                 </a:solidFill>
                 <a:latin typeface="Calibri" pitchFamily="34" charset="0"/>
                 <a:ea typeface="Calibri" pitchFamily="34" charset="-122"/>
@@ -1887,7 +1887,7 @@
             <a:avLst/>
           </a:prstGeom>
           <a:solidFill>
-            <a:srgbClr val="C89B3C"/>
+            <a:srgbClr val="FDB913"/>
           </a:solidFill>
           <a:ln/>
         </p:spPr>
@@ -1969,7 +1969,7 @@
     <p:bg>
       <p:bgPr>
         <a:solidFill>
-          <a:srgbClr val="241033"/>
+          <a:srgbClr val="001233"/>
         </a:solidFill>
       </p:bgPr>
     </p:bg>
@@ -2002,7 +2002,7 @@
             <a:avLst/>
           </a:prstGeom>
           <a:solidFill>
-            <a:srgbClr val="3A1959"/>
+            <a:srgbClr val="0047AB"/>
           </a:solidFill>
           <a:ln/>
         </p:spPr>
@@ -2022,7 +2022,7 @@
             <a:avLst/>
           </a:prstGeom>
           <a:solidFill>
-            <a:srgbClr val="C89B3C"/>
+            <a:srgbClr val="FDB913"/>
           </a:solidFill>
           <a:ln/>
         </p:spPr>
@@ -2120,7 +2120,7 @@
             <a:r>
               <a:rPr lang="en-US" sz="1700" dirty="0">
                 <a:solidFill>
-                  <a:srgbClr val="F6EFDE"/>
+                  <a:srgbClr val="FFF6DF"/>
                 </a:solidFill>
                 <a:latin typeface="Calibri" pitchFamily="34" charset="0"/>
                 <a:ea typeface="Calibri" pitchFamily="34" charset="-122"/>
@@ -2147,7 +2147,7 @@
             <a:avLst/>
           </a:prstGeom>
           <a:solidFill>
-            <a:srgbClr val="3A1959"/>
+            <a:srgbClr val="0047AB"/>
           </a:solidFill>
           <a:ln/>
         </p:spPr>
@@ -2230,7 +2230,7 @@
             <a:avLst/>
           </a:prstGeom>
           <a:solidFill>
-            <a:srgbClr val="3A1959"/>
+            <a:srgbClr val="0047AB"/>
           </a:solidFill>
           <a:ln/>
         </p:spPr>
@@ -2313,7 +2313,7 @@
             <a:avLst/>
           </a:prstGeom>
           <a:solidFill>
-            <a:srgbClr val="3A1959"/>
+            <a:srgbClr val="0047AB"/>
           </a:solidFill>
           <a:ln/>
         </p:spPr>
@@ -2396,7 +2396,7 @@
             <a:avLst/>
           </a:prstGeom>
           <a:solidFill>
-            <a:srgbClr val="3A1959"/>
+            <a:srgbClr val="0047AB"/>
           </a:solidFill>
           <a:ln/>
         </p:spPr>
@@ -2562,7 +2562,7 @@
             <a:r>
               <a:rPr lang="en-US" sz="1300" b="1" spc="200" kern="0" dirty="0">
                 <a:solidFill>
-                  <a:srgbClr val="C89B3C"/>
+                  <a:srgbClr val="FDB913"/>
                 </a:solidFill>
                 <a:latin typeface="Calibri" pitchFamily="34" charset="0"/>
                 <a:ea typeface="Calibri" pitchFamily="34" charset="-122"/>
@@ -2601,7 +2601,7 @@
             <a:r>
               <a:rPr lang="en-US" sz="3000" b="1" dirty="0">
                 <a:solidFill>
-                  <a:srgbClr val="241033"/>
+                  <a:srgbClr val="001233"/>
                 </a:solidFill>
                 <a:latin typeface="Cambria" pitchFamily="34" charset="0"/>
                 <a:ea typeface="Cambria" pitchFamily="34" charset="-122"/>
@@ -2685,7 +2685,7 @@
             <a:r>
               <a:rPr lang="en-US" sz="1600" b="1" dirty="0">
                 <a:solidFill>
-                  <a:srgbClr val="241033"/>
+                  <a:srgbClr val="001233"/>
                 </a:solidFill>
                 <a:latin typeface="Calibri" pitchFamily="34" charset="0"/>
                 <a:ea typeface="Calibri" pitchFamily="34" charset="-122"/>
@@ -2731,7 +2731,7 @@
             </a:avLst>
           </a:prstGeom>
           <a:solidFill>
-            <a:srgbClr val="F1ECF6"/>
+            <a:srgbClr val="E9F0FA"/>
           </a:solidFill>
           <a:ln/>
           <a:effectLst>
@@ -2758,7 +2758,7 @@
             <a:avLst/>
           </a:prstGeom>
           <a:solidFill>
-            <a:srgbClr val="4B1F6F"/>
+            <a:srgbClr val="00338D"/>
           </a:solidFill>
           <a:ln/>
         </p:spPr>
@@ -2814,7 +2814,7 @@
             <a:r>
               <a:rPr lang="en-US" sz="1600" b="1" dirty="0">
                 <a:solidFill>
-                  <a:srgbClr val="241033"/>
+                  <a:srgbClr val="001233"/>
                 </a:solidFill>
                 <a:latin typeface="Calibri" pitchFamily="34" charset="0"/>
                 <a:ea typeface="Calibri" pitchFamily="34" charset="-122"/>
@@ -2853,7 +2853,7 @@
             <a:r>
               <a:rPr lang="en-US" sz="4000" b="1" dirty="0">
                 <a:solidFill>
-                  <a:srgbClr val="241033"/>
+                  <a:srgbClr val="001233"/>
                 </a:solidFill>
                 <a:latin typeface="Cambria" pitchFamily="34" charset="0"/>
                 <a:ea typeface="Cambria" pitchFamily="34" charset="-122"/>
@@ -3080,7 +3080,7 @@
             <a:r>
               <a:rPr lang="en-US" sz="1300" b="1" spc="200" kern="0" dirty="0">
                 <a:solidFill>
-                  <a:srgbClr val="C89B3C"/>
+                  <a:srgbClr val="FDB913"/>
                 </a:solidFill>
                 <a:latin typeface="Calibri" pitchFamily="34" charset="0"/>
                 <a:ea typeface="Calibri" pitchFamily="34" charset="-122"/>
@@ -3119,7 +3119,7 @@
             <a:r>
               <a:rPr lang="en-US" sz="3000" b="1" dirty="0">
                 <a:solidFill>
-                  <a:srgbClr val="241033"/>
+                  <a:srgbClr val="001233"/>
                 </a:solidFill>
                 <a:latin typeface="Cambria" pitchFamily="34" charset="0"/>
                 <a:ea typeface="Cambria" pitchFamily="34" charset="-122"/>
@@ -3148,7 +3148,7 @@
             </a:avLst>
           </a:prstGeom>
           <a:solidFill>
-            <a:srgbClr val="4B1F6F"/>
+            <a:srgbClr val="00338D"/>
           </a:solidFill>
           <a:ln/>
         </p:spPr>
@@ -3168,7 +3168,7 @@
             <a:avLst/>
           </a:prstGeom>
           <a:solidFill>
-            <a:srgbClr val="C89B3C"/>
+            <a:srgbClr val="FDB913"/>
           </a:solidFill>
           <a:ln/>
         </p:spPr>
@@ -3256,7 +3256,7 @@
             </a:avLst>
           </a:prstGeom>
           <a:solidFill>
-            <a:srgbClr val="F1ECF6"/>
+            <a:srgbClr val="E9F0FA"/>
           </a:solidFill>
           <a:ln/>
         </p:spPr>
@@ -3288,7 +3288,7 @@
             <a:r>
               <a:rPr lang="en-US" sz="3200" b="1" dirty="0">
                 <a:solidFill>
-                  <a:srgbClr val="241033"/>
+                  <a:srgbClr val="001233"/>
                 </a:solidFill>
                 <a:latin typeface="Cambria" pitchFamily="34" charset="0"/>
                 <a:ea typeface="Cambria" pitchFamily="34" charset="-122"/>
@@ -3356,7 +3356,7 @@
             </a:avLst>
           </a:prstGeom>
           <a:solidFill>
-            <a:srgbClr val="F1ECF6"/>
+            <a:srgbClr val="E9F0FA"/>
           </a:solidFill>
           <a:ln/>
         </p:spPr>
@@ -3388,7 +3388,7 @@
             <a:r>
               <a:rPr lang="en-US" sz="3200" b="1" dirty="0">
                 <a:solidFill>
-                  <a:srgbClr val="241033"/>
+                  <a:srgbClr val="001233"/>
                 </a:solidFill>
                 <a:latin typeface="Cambria" pitchFamily="34" charset="0"/>
                 <a:ea typeface="Cambria" pitchFamily="34" charset="-122"/>
@@ -3456,7 +3456,7 @@
             </a:avLst>
           </a:prstGeom>
           <a:solidFill>
-            <a:srgbClr val="F1ECF6"/>
+            <a:srgbClr val="E9F0FA"/>
           </a:solidFill>
           <a:ln/>
         </p:spPr>
@@ -3488,7 +3488,7 @@
             <a:r>
               <a:rPr lang="en-US" sz="3200" b="1" dirty="0">
                 <a:solidFill>
-                  <a:srgbClr val="241033"/>
+                  <a:srgbClr val="001233"/>
                 </a:solidFill>
                 <a:latin typeface="Cambria" pitchFamily="34" charset="0"/>
                 <a:ea typeface="Cambria" pitchFamily="34" charset="-122"/>
@@ -3556,7 +3556,7 @@
             </a:avLst>
           </a:prstGeom>
           <a:solidFill>
-            <a:srgbClr val="F1ECF6"/>
+            <a:srgbClr val="E9F0FA"/>
           </a:solidFill>
           <a:ln/>
         </p:spPr>
@@ -3588,7 +3588,7 @@
             <a:r>
               <a:rPr lang="en-US" sz="3200" b="1" dirty="0">
                 <a:solidFill>
-                  <a:srgbClr val="241033"/>
+                  <a:srgbClr val="001233"/>
                 </a:solidFill>
                 <a:latin typeface="Cambria" pitchFamily="34" charset="0"/>
                 <a:ea typeface="Cambria" pitchFamily="34" charset="-122"/>
@@ -3776,7 +3776,7 @@
             <a:r>
               <a:rPr lang="en-US" sz="1300" b="1" spc="200" kern="0" dirty="0">
                 <a:solidFill>
-                  <a:srgbClr val="C89B3C"/>
+                  <a:srgbClr val="FDB913"/>
                 </a:solidFill>
                 <a:latin typeface="Calibri" pitchFamily="34" charset="0"/>
                 <a:ea typeface="Calibri" pitchFamily="34" charset="-122"/>
@@ -3815,7 +3815,7 @@
             <a:r>
               <a:rPr lang="en-US" sz="3000" b="1" dirty="0">
                 <a:solidFill>
-                  <a:srgbClr val="241033"/>
+                  <a:srgbClr val="001233"/>
                 </a:solidFill>
                 <a:latin typeface="Cambria" pitchFamily="34" charset="0"/>
                 <a:ea typeface="Cambria" pitchFamily="34" charset="-122"/>
@@ -3842,7 +3842,7 @@
             <a:avLst/>
           </a:prstGeom>
           <a:solidFill>
-            <a:srgbClr val="4B1F6F"/>
+            <a:srgbClr val="00338D"/>
           </a:solidFill>
           <a:ln/>
         </p:spPr>
@@ -3928,7 +3928,7 @@
             <a:avLst/>
           </a:prstGeom>
           <a:solidFill>
-            <a:srgbClr val="4B1F6F"/>
+            <a:srgbClr val="00338D"/>
           </a:solidFill>
           <a:ln/>
         </p:spPr>
@@ -4014,7 +4014,7 @@
             <a:avLst/>
           </a:prstGeom>
           <a:solidFill>
-            <a:srgbClr val="4B1F6F"/>
+            <a:srgbClr val="00338D"/>
           </a:solidFill>
           <a:ln/>
         </p:spPr>
@@ -4100,7 +4100,7 @@
             <a:avLst/>
           </a:prstGeom>
           <a:solidFill>
-            <a:srgbClr val="4B1F6F"/>
+            <a:srgbClr val="00338D"/>
           </a:solidFill>
           <a:ln/>
         </p:spPr>
@@ -4186,7 +4186,7 @@
             <a:avLst/>
           </a:prstGeom>
           <a:solidFill>
-            <a:srgbClr val="4B1F6F"/>
+            <a:srgbClr val="00338D"/>
           </a:solidFill>
           <a:ln/>
         </p:spPr>
@@ -4394,7 +4394,7 @@
             <a:r>
               <a:rPr lang="en-US" sz="1300" b="1" spc="200" kern="0" dirty="0">
                 <a:solidFill>
-                  <a:srgbClr val="C89B3C"/>
+                  <a:srgbClr val="FDB913"/>
                 </a:solidFill>
                 <a:latin typeface="Calibri" pitchFamily="34" charset="0"/>
                 <a:ea typeface="Calibri" pitchFamily="34" charset="-122"/>
@@ -4433,7 +4433,7 @@
             <a:r>
               <a:rPr lang="en-US" sz="3000" b="1" dirty="0">
                 <a:solidFill>
-                  <a:srgbClr val="241033"/>
+                  <a:srgbClr val="001233"/>
                 </a:solidFill>
                 <a:latin typeface="Cambria" pitchFamily="34" charset="0"/>
                 <a:ea typeface="Cambria" pitchFamily="34" charset="-122"/>
@@ -4501,7 +4501,7 @@
             </a:avLst>
           </a:prstGeom>
           <a:solidFill>
-            <a:srgbClr val="F1ECF6"/>
+            <a:srgbClr val="E9F0FA"/>
           </a:solidFill>
           <a:ln/>
         </p:spPr>
@@ -4533,7 +4533,7 @@
             <a:r>
               <a:rPr lang="en-US" sz="1700" b="1" dirty="0">
                 <a:solidFill>
-                  <a:srgbClr val="241033"/>
+                  <a:srgbClr val="001233"/>
                 </a:solidFill>
                 <a:latin typeface="Calibri" pitchFamily="34" charset="0"/>
                 <a:ea typeface="Calibri" pitchFamily="34" charset="-122"/>
@@ -4680,7 +4680,7 @@
             </a:avLst>
           </a:prstGeom>
           <a:solidFill>
-            <a:srgbClr val="F6EFDE"/>
+            <a:srgbClr val="FFF6DF"/>
           </a:solidFill>
           <a:ln/>
         </p:spPr>
@@ -4712,7 +4712,7 @@
             <a:r>
               <a:rPr lang="en-US" sz="1700" b="1" dirty="0">
                 <a:solidFill>
-                  <a:srgbClr val="241033"/>
+                  <a:srgbClr val="001233"/>
                 </a:solidFill>
                 <a:latin typeface="Calibri" pitchFamily="34" charset="0"/>
                 <a:ea typeface="Calibri" pitchFamily="34" charset="-122"/>
@@ -4979,7 +4979,7 @@
             <a:r>
               <a:rPr lang="en-US" sz="1300" b="1" spc="200" kern="0" dirty="0">
                 <a:solidFill>
-                  <a:srgbClr val="C89B3C"/>
+                  <a:srgbClr val="FDB913"/>
                 </a:solidFill>
                 <a:latin typeface="Calibri" pitchFamily="34" charset="0"/>
                 <a:ea typeface="Calibri" pitchFamily="34" charset="-122"/>
@@ -5018,7 +5018,7 @@
             <a:r>
               <a:rPr lang="en-US" sz="3000" b="1" dirty="0">
                 <a:solidFill>
-                  <a:srgbClr val="241033"/>
+                  <a:srgbClr val="001233"/>
                 </a:solidFill>
                 <a:latin typeface="Cambria" pitchFamily="34" charset="0"/>
                 <a:ea typeface="Cambria" pitchFamily="34" charset="-122"/>
@@ -5124,7 +5124,7 @@
                       <a:tailEnd type="none" w="med" len="med"/>
                     </a:lnB>
                     <a:solidFill>
-                      <a:srgbClr val="4B1F6F"/>
+                      <a:srgbClr val="00338D"/>
                     </a:solidFill>
                   </a:tcPr>
                 </a:tc>
@@ -5192,7 +5192,7 @@
                       <a:tailEnd type="none" w="med" len="med"/>
                     </a:lnB>
                     <a:solidFill>
-                      <a:srgbClr val="4B1F6F"/>
+                      <a:srgbClr val="00338D"/>
                     </a:solidFill>
                   </a:tcPr>
                 </a:tc>
@@ -5260,7 +5260,7 @@
                       <a:tailEnd type="none" w="med" len="med"/>
                     </a:lnB>
                     <a:solidFill>
-                      <a:srgbClr val="4B1F6F"/>
+                      <a:srgbClr val="00338D"/>
                     </a:solidFill>
                   </a:tcPr>
                 </a:tc>
@@ -5328,7 +5328,7 @@
                       <a:tailEnd type="none" w="med" len="med"/>
                     </a:lnB>
                     <a:solidFill>
-                      <a:srgbClr val="4B1F6F"/>
+                      <a:srgbClr val="00338D"/>
                     </a:solidFill>
                   </a:tcPr>
                 </a:tc>
@@ -5396,7 +5396,7 @@
                       <a:tailEnd type="none" w="med" len="med"/>
                     </a:lnB>
                     <a:solidFill>
-                      <a:srgbClr val="4B1F6F"/>
+                      <a:srgbClr val="00338D"/>
                     </a:solidFill>
                   </a:tcPr>
                 </a:tc>
@@ -5466,7 +5466,7 @@
                       <a:tailEnd type="none" w="med" len="med"/>
                     </a:lnB>
                     <a:solidFill>
-                      <a:srgbClr val="F1ECF6"/>
+                      <a:srgbClr val="E9F0FA"/>
                     </a:solidFill>
                   </a:tcPr>
                 </a:tc>
@@ -5534,7 +5534,7 @@
                       <a:tailEnd type="none" w="med" len="med"/>
                     </a:lnB>
                     <a:solidFill>
-                      <a:srgbClr val="F1ECF6"/>
+                      <a:srgbClr val="E9F0FA"/>
                     </a:solidFill>
                   </a:tcPr>
                 </a:tc>
@@ -5602,7 +5602,7 @@
                       <a:tailEnd type="none" w="med" len="med"/>
                     </a:lnB>
                     <a:solidFill>
-                      <a:srgbClr val="F1ECF6"/>
+                      <a:srgbClr val="E9F0FA"/>
                     </a:solidFill>
                   </a:tcPr>
                 </a:tc>
@@ -5670,7 +5670,7 @@
                       <a:tailEnd type="none" w="med" len="med"/>
                     </a:lnB>
                     <a:solidFill>
-                      <a:srgbClr val="F1ECF6"/>
+                      <a:srgbClr val="E9F0FA"/>
                     </a:solidFill>
                   </a:tcPr>
                 </a:tc>
@@ -5738,7 +5738,7 @@
                       <a:tailEnd type="none" w="med" len="med"/>
                     </a:lnB>
                     <a:solidFill>
-                      <a:srgbClr val="F1ECF6"/>
+                      <a:srgbClr val="E9F0FA"/>
                     </a:solidFill>
                   </a:tcPr>
                 </a:tc>
@@ -6150,7 +6150,7 @@
                       <a:tailEnd type="none" w="med" len="med"/>
                     </a:lnB>
                     <a:solidFill>
-                      <a:srgbClr val="F1ECF6"/>
+                      <a:srgbClr val="E9F0FA"/>
                     </a:solidFill>
                   </a:tcPr>
                 </a:tc>
@@ -6218,7 +6218,7 @@
                       <a:tailEnd type="none" w="med" len="med"/>
                     </a:lnB>
                     <a:solidFill>
-                      <a:srgbClr val="F1ECF6"/>
+                      <a:srgbClr val="E9F0FA"/>
                     </a:solidFill>
                   </a:tcPr>
                 </a:tc>
@@ -6286,7 +6286,7 @@
                       <a:tailEnd type="none" w="med" len="med"/>
                     </a:lnB>
                     <a:solidFill>
-                      <a:srgbClr val="F1ECF6"/>
+                      <a:srgbClr val="E9F0FA"/>
                     </a:solidFill>
                   </a:tcPr>
                 </a:tc>
@@ -6354,7 +6354,7 @@
                       <a:tailEnd type="none" w="med" len="med"/>
                     </a:lnB>
                     <a:solidFill>
-                      <a:srgbClr val="F1ECF6"/>
+                      <a:srgbClr val="E9F0FA"/>
                     </a:solidFill>
                   </a:tcPr>
                 </a:tc>
@@ -6422,7 +6422,7 @@
                       <a:tailEnd type="none" w="med" len="med"/>
                     </a:lnB>
                     <a:solidFill>
-                      <a:srgbClr val="F1ECF6"/>
+                      <a:srgbClr val="E9F0FA"/>
                     </a:solidFill>
                   </a:tcPr>
                 </a:tc>
@@ -6448,7 +6448,7 @@
             </a:avLst>
           </a:prstGeom>
           <a:solidFill>
-            <a:srgbClr val="F6EFDE"/>
+            <a:srgbClr val="FFF6DF"/>
           </a:solidFill>
           <a:ln/>
         </p:spPr>
@@ -6483,7 +6483,7 @@
             <a:r>
               <a:rPr lang="en-US" sz="1400" b="1" dirty="0">
                 <a:solidFill>
-                  <a:srgbClr val="241033"/>
+                  <a:srgbClr val="001233"/>
                 </a:solidFill>
                 <a:latin typeface="Calibri" pitchFamily="34" charset="0"/>
                 <a:ea typeface="Calibri" pitchFamily="34" charset="-122"/>
@@ -6688,7 +6688,7 @@
             <a:r>
               <a:rPr lang="en-US" sz="1300" b="1" spc="200" kern="0" dirty="0">
                 <a:solidFill>
-                  <a:srgbClr val="C89B3C"/>
+                  <a:srgbClr val="FDB913"/>
                 </a:solidFill>
                 <a:latin typeface="Calibri" pitchFamily="34" charset="0"/>
                 <a:ea typeface="Calibri" pitchFamily="34" charset="-122"/>
@@ -6727,7 +6727,7 @@
             <a:r>
               <a:rPr lang="en-US" sz="3000" b="1" dirty="0">
                 <a:solidFill>
-                  <a:srgbClr val="241033"/>
+                  <a:srgbClr val="001233"/>
                 </a:solidFill>
                 <a:latin typeface="Cambria" pitchFamily="34" charset="0"/>
                 <a:ea typeface="Cambria" pitchFamily="34" charset="-122"/>
@@ -6756,7 +6756,7 @@
             </a:avLst>
           </a:prstGeom>
           <a:solidFill>
-            <a:srgbClr val="F1ECF6"/>
+            <a:srgbClr val="E9F0FA"/>
           </a:solidFill>
           <a:ln/>
         </p:spPr>
@@ -6776,7 +6776,7 @@
             <a:avLst/>
           </a:prstGeom>
           <a:solidFill>
-            <a:srgbClr val="4B1F6F"/>
+            <a:srgbClr val="00338D"/>
           </a:solidFill>
           <a:ln/>
         </p:spPr>
@@ -6832,7 +6832,7 @@
             <a:r>
               <a:rPr lang="en-US" sz="1700" b="1" dirty="0">
                 <a:solidFill>
-                  <a:srgbClr val="241033"/>
+                  <a:srgbClr val="001233"/>
                 </a:solidFill>
                 <a:latin typeface="Calibri" pitchFamily="34" charset="0"/>
                 <a:ea typeface="Calibri" pitchFamily="34" charset="-122"/>
@@ -6943,7 +6943,7 @@
             </a:avLst>
           </a:prstGeom>
           <a:solidFill>
-            <a:srgbClr val="F1ECF6"/>
+            <a:srgbClr val="E9F0FA"/>
           </a:solidFill>
           <a:ln/>
         </p:spPr>
@@ -6963,7 +6963,7 @@
             <a:avLst/>
           </a:prstGeom>
           <a:solidFill>
-            <a:srgbClr val="4B1F6F"/>
+            <a:srgbClr val="00338D"/>
           </a:solidFill>
           <a:ln/>
         </p:spPr>
@@ -7019,7 +7019,7 @@
             <a:r>
               <a:rPr lang="en-US" sz="1700" b="1" dirty="0">
                 <a:solidFill>
-                  <a:srgbClr val="241033"/>
+                  <a:srgbClr val="001233"/>
                 </a:solidFill>
                 <a:latin typeface="Calibri" pitchFamily="34" charset="0"/>
                 <a:ea typeface="Calibri" pitchFamily="34" charset="-122"/>
@@ -7130,7 +7130,7 @@
             </a:avLst>
           </a:prstGeom>
           <a:solidFill>
-            <a:srgbClr val="F1ECF6"/>
+            <a:srgbClr val="E9F0FA"/>
           </a:solidFill>
           <a:ln/>
         </p:spPr>
@@ -7150,7 +7150,7 @@
             <a:avLst/>
           </a:prstGeom>
           <a:solidFill>
-            <a:srgbClr val="4B1F6F"/>
+            <a:srgbClr val="00338D"/>
           </a:solidFill>
           <a:ln/>
         </p:spPr>
@@ -7206,7 +7206,7 @@
             <a:r>
               <a:rPr lang="en-US" sz="1700" b="1" dirty="0">
                 <a:solidFill>
-                  <a:srgbClr val="241033"/>
+                  <a:srgbClr val="001233"/>
                 </a:solidFill>
                 <a:latin typeface="Calibri" pitchFamily="34" charset="0"/>
                 <a:ea typeface="Calibri" pitchFamily="34" charset="-122"/>
@@ -7437,7 +7437,7 @@
             <a:r>
               <a:rPr lang="en-US" sz="1300" b="1" spc="200" kern="0" dirty="0">
                 <a:solidFill>
-                  <a:srgbClr val="C89B3C"/>
+                  <a:srgbClr val="FDB913"/>
                 </a:solidFill>
                 <a:latin typeface="Calibri" pitchFamily="34" charset="0"/>
                 <a:ea typeface="Calibri" pitchFamily="34" charset="-122"/>
@@ -7476,7 +7476,7 @@
             <a:r>
               <a:rPr lang="en-US" sz="3000" b="1" dirty="0">
                 <a:solidFill>
-                  <a:srgbClr val="241033"/>
+                  <a:srgbClr val="001233"/>
                 </a:solidFill>
                 <a:latin typeface="Cambria" pitchFamily="34" charset="0"/>
                 <a:ea typeface="Cambria" pitchFamily="34" charset="-122"/>
@@ -7618,7 +7618,7 @@
                       <a:tailEnd type="none" w="med" len="med"/>
                     </a:lnB>
                     <a:solidFill>
-                      <a:srgbClr val="4B1F6F"/>
+                      <a:srgbClr val="00338D"/>
                     </a:solidFill>
                   </a:tcPr>
                 </a:tc>
@@ -7686,7 +7686,7 @@
                       <a:tailEnd type="none" w="med" len="med"/>
                     </a:lnB>
                     <a:solidFill>
-                      <a:srgbClr val="4B1F6F"/>
+                      <a:srgbClr val="00338D"/>
                     </a:solidFill>
                   </a:tcPr>
                 </a:tc>
@@ -7756,7 +7756,7 @@
                       <a:tailEnd type="none" w="med" len="med"/>
                     </a:lnB>
                     <a:solidFill>
-                      <a:srgbClr val="F1ECF6"/>
+                      <a:srgbClr val="E9F0FA"/>
                     </a:solidFill>
                   </a:tcPr>
                 </a:tc>
@@ -7824,7 +7824,7 @@
                       <a:tailEnd type="none" w="med" len="med"/>
                     </a:lnB>
                     <a:solidFill>
-                      <a:srgbClr val="F1ECF6"/>
+                      <a:srgbClr val="E9F0FA"/>
                     </a:solidFill>
                   </a:tcPr>
                 </a:tc>
@@ -8032,7 +8032,7 @@
                       <a:tailEnd type="none" w="med" len="med"/>
                     </a:lnB>
                     <a:solidFill>
-                      <a:srgbClr val="F1ECF6"/>
+                      <a:srgbClr val="E9F0FA"/>
                     </a:solidFill>
                   </a:tcPr>
                 </a:tc>
@@ -8100,7 +8100,7 @@
                       <a:tailEnd type="none" w="med" len="med"/>
                     </a:lnB>
                     <a:solidFill>
-                      <a:srgbClr val="F1ECF6"/>
+                      <a:srgbClr val="E9F0FA"/>
                     </a:solidFill>
                   </a:tcPr>
                 </a:tc>
@@ -8308,7 +8308,7 @@
                       <a:tailEnd type="none" w="med" len="med"/>
                     </a:lnB>
                     <a:solidFill>
-                      <a:srgbClr val="F1ECF6"/>
+                      <a:srgbClr val="E9F0FA"/>
                     </a:solidFill>
                   </a:tcPr>
                 </a:tc>
@@ -8376,7 +8376,7 @@
                       <a:tailEnd type="none" w="med" len="med"/>
                     </a:lnB>
                     <a:solidFill>
-                      <a:srgbClr val="F1ECF6"/>
+                      <a:srgbClr val="E9F0FA"/>
                     </a:solidFill>
                   </a:tcPr>
                 </a:tc>
@@ -8660,7 +8660,7 @@
             <a:r>
               <a:rPr lang="en-US" sz="1300" b="1" spc="200" kern="0" dirty="0">
                 <a:solidFill>
-                  <a:srgbClr val="C89B3C"/>
+                  <a:srgbClr val="FDB913"/>
                 </a:solidFill>
                 <a:latin typeface="Calibri" pitchFamily="34" charset="0"/>
                 <a:ea typeface="Calibri" pitchFamily="34" charset="-122"/>
@@ -8699,7 +8699,7 @@
             <a:r>
               <a:rPr lang="en-US" sz="3000" b="1" dirty="0">
                 <a:solidFill>
-                  <a:srgbClr val="241033"/>
+                  <a:srgbClr val="001233"/>
                 </a:solidFill>
                 <a:latin typeface="Cambria" pitchFamily="34" charset="0"/>
                 <a:ea typeface="Cambria" pitchFamily="34" charset="-122"/>
@@ -8728,7 +8728,7 @@
           <a:noFill/>
           <a:ln w="31750">
             <a:solidFill>
-              <a:srgbClr val="C89B3C"/>
+              <a:srgbClr val="FDB913"/>
             </a:solidFill>
             <a:prstDash val="dash"/>
           </a:ln>
@@ -8749,7 +8749,7 @@
             <a:avLst/>
           </a:prstGeom>
           <a:solidFill>
-            <a:srgbClr val="4B1F6F"/>
+            <a:srgbClr val="00338D"/>
           </a:solidFill>
           <a:ln w="25400">
             <a:solidFill>
@@ -8815,7 +8815,7 @@
             </a:avLst>
           </a:prstGeom>
           <a:solidFill>
-            <a:srgbClr val="F1ECF6"/>
+            <a:srgbClr val="E9F0FA"/>
           </a:solidFill>
           <a:ln/>
         </p:spPr>
@@ -8847,7 +8847,7 @@
             <a:r>
               <a:rPr lang="en-US" sz="1200" b="1" dirty="0">
                 <a:solidFill>
-                  <a:srgbClr val="9C7627"/>
+                  <a:srgbClr val="B8860B"/>
                 </a:solidFill>
                 <a:latin typeface="Calibri" pitchFamily="34" charset="0"/>
                 <a:ea typeface="Calibri" pitchFamily="34" charset="-122"/>
@@ -8886,7 +8886,7 @@
             <a:r>
               <a:rPr lang="en-US" sz="1600" b="1" dirty="0">
                 <a:solidFill>
-                  <a:srgbClr val="241033"/>
+                  <a:srgbClr val="001233"/>
                 </a:solidFill>
                 <a:latin typeface="Calibri" pitchFamily="34" charset="0"/>
                 <a:ea typeface="Calibri" pitchFamily="34" charset="-122"/>
@@ -8952,7 +8952,7 @@
             <a:avLst/>
           </a:prstGeom>
           <a:solidFill>
-            <a:srgbClr val="4B1F6F"/>
+            <a:srgbClr val="00338D"/>
           </a:solidFill>
           <a:ln w="25400">
             <a:solidFill>
@@ -9018,7 +9018,7 @@
             </a:avLst>
           </a:prstGeom>
           <a:solidFill>
-            <a:srgbClr val="F1ECF6"/>
+            <a:srgbClr val="E9F0FA"/>
           </a:solidFill>
           <a:ln/>
         </p:spPr>
@@ -9050,7 +9050,7 @@
             <a:r>
               <a:rPr lang="en-US" sz="1200" b="1" dirty="0">
                 <a:solidFill>
-                  <a:srgbClr val="9C7627"/>
+                  <a:srgbClr val="B8860B"/>
                 </a:solidFill>
                 <a:latin typeface="Calibri" pitchFamily="34" charset="0"/>
                 <a:ea typeface="Calibri" pitchFamily="34" charset="-122"/>
@@ -9089,7 +9089,7 @@
             <a:r>
               <a:rPr lang="en-US" sz="1600" b="1" dirty="0">
                 <a:solidFill>
-                  <a:srgbClr val="241033"/>
+                  <a:srgbClr val="001233"/>
                 </a:solidFill>
                 <a:latin typeface="Calibri" pitchFamily="34" charset="0"/>
                 <a:ea typeface="Calibri" pitchFamily="34" charset="-122"/>
@@ -9155,7 +9155,7 @@
             <a:avLst/>
           </a:prstGeom>
           <a:solidFill>
-            <a:srgbClr val="4B1F6F"/>
+            <a:srgbClr val="00338D"/>
           </a:solidFill>
           <a:ln w="25400">
             <a:solidFill>
@@ -9221,7 +9221,7 @@
             </a:avLst>
           </a:prstGeom>
           <a:solidFill>
-            <a:srgbClr val="F1ECF6"/>
+            <a:srgbClr val="E9F0FA"/>
           </a:solidFill>
           <a:ln/>
         </p:spPr>
@@ -9253,7 +9253,7 @@
             <a:r>
               <a:rPr lang="en-US" sz="1200" b="1" dirty="0">
                 <a:solidFill>
-                  <a:srgbClr val="9C7627"/>
+                  <a:srgbClr val="B8860B"/>
                 </a:solidFill>
                 <a:latin typeface="Calibri" pitchFamily="34" charset="0"/>
                 <a:ea typeface="Calibri" pitchFamily="34" charset="-122"/>
@@ -9292,7 +9292,7 @@
             <a:r>
               <a:rPr lang="en-US" sz="1600" b="1" dirty="0">
                 <a:solidFill>
-                  <a:srgbClr val="241033"/>
+                  <a:srgbClr val="001233"/>
                 </a:solidFill>
                 <a:latin typeface="Calibri" pitchFamily="34" charset="0"/>
                 <a:ea typeface="Calibri" pitchFamily="34" charset="-122"/>
@@ -9358,7 +9358,7 @@
             <a:avLst/>
           </a:prstGeom>
           <a:solidFill>
-            <a:srgbClr val="4B1F6F"/>
+            <a:srgbClr val="00338D"/>
           </a:solidFill>
           <a:ln w="25400">
             <a:solidFill>
@@ -9424,7 +9424,7 @@
             </a:avLst>
           </a:prstGeom>
           <a:solidFill>
-            <a:srgbClr val="F1ECF6"/>
+            <a:srgbClr val="E9F0FA"/>
           </a:solidFill>
           <a:ln/>
         </p:spPr>
@@ -9456,7 +9456,7 @@
             <a:r>
               <a:rPr lang="en-US" sz="1200" b="1" dirty="0">
                 <a:solidFill>
-                  <a:srgbClr val="9C7627"/>
+                  <a:srgbClr val="B8860B"/>
                 </a:solidFill>
                 <a:latin typeface="Calibri" pitchFamily="34" charset="0"/>
                 <a:ea typeface="Calibri" pitchFamily="34" charset="-122"/>
@@ -9495,7 +9495,7 @@
             <a:r>
               <a:rPr lang="en-US" sz="1600" b="1" dirty="0">
                 <a:solidFill>
-                  <a:srgbClr val="241033"/>
+                  <a:srgbClr val="001233"/>
                 </a:solidFill>
                 <a:latin typeface="Calibri" pitchFamily="34" charset="0"/>
                 <a:ea typeface="Calibri" pitchFamily="34" charset="-122"/>
@@ -9573,7 +9573,7 @@
             <a:r>
               <a:rPr lang="en-US" sz="1600" b="1" dirty="0">
                 <a:solidFill>
-                  <a:srgbClr val="241033"/>
+                  <a:srgbClr val="001233"/>
                 </a:solidFill>
                 <a:latin typeface="Calibri" pitchFamily="34" charset="0"/>
                 <a:ea typeface="Calibri" pitchFamily="34" charset="-122"/>
@@ -9600,7 +9600,7 @@
             <a:avLst/>
           </a:prstGeom>
           <a:solidFill>
-            <a:srgbClr val="4B1F6F"/>
+            <a:srgbClr val="00338D"/>
           </a:solidFill>
           <a:ln/>
         </p:spPr>
@@ -9656,7 +9656,7 @@
             <a:r>
               <a:rPr lang="en-US" sz="1300" b="1" dirty="0">
                 <a:solidFill>
-                  <a:srgbClr val="241033"/>
+                  <a:srgbClr val="001233"/>
                 </a:solidFill>
                 <a:latin typeface="Calibri" pitchFamily="34" charset="0"/>
                 <a:ea typeface="Calibri" pitchFamily="34" charset="-122"/>
@@ -9722,7 +9722,7 @@
             <a:avLst/>
           </a:prstGeom>
           <a:solidFill>
-            <a:srgbClr val="4B1F6F"/>
+            <a:srgbClr val="00338D"/>
           </a:solidFill>
           <a:ln/>
         </p:spPr>
@@ -9778,7 +9778,7 @@
             <a:r>
               <a:rPr lang="en-US" sz="1300" b="1" dirty="0">
                 <a:solidFill>
-                  <a:srgbClr val="241033"/>
+                  <a:srgbClr val="001233"/>
                 </a:solidFill>
                 <a:latin typeface="Calibri" pitchFamily="34" charset="0"/>
                 <a:ea typeface="Calibri" pitchFamily="34" charset="-122"/>
@@ -9844,7 +9844,7 @@
             <a:avLst/>
           </a:prstGeom>
           <a:solidFill>
-            <a:srgbClr val="4B1F6F"/>
+            <a:srgbClr val="00338D"/>
           </a:solidFill>
           <a:ln/>
         </p:spPr>
@@ -9900,7 +9900,7 @@
             <a:r>
               <a:rPr lang="en-US" sz="1300" b="1" dirty="0">
                 <a:solidFill>
-                  <a:srgbClr val="241033"/>
+                  <a:srgbClr val="001233"/>
                 </a:solidFill>
                 <a:latin typeface="Calibri" pitchFamily="34" charset="0"/>
                 <a:ea typeface="Calibri" pitchFamily="34" charset="-122"/>
@@ -9966,7 +9966,7 @@
             <a:avLst/>
           </a:prstGeom>
           <a:solidFill>
-            <a:srgbClr val="4B1F6F"/>
+            <a:srgbClr val="00338D"/>
           </a:solidFill>
           <a:ln/>
         </p:spPr>
@@ -10022,7 +10022,7 @@
             <a:r>
               <a:rPr lang="en-US" sz="1300" b="1" dirty="0">
                 <a:solidFill>
-                  <a:srgbClr val="241033"/>
+                  <a:srgbClr val="001233"/>
                 </a:solidFill>
                 <a:latin typeface="Calibri" pitchFamily="34" charset="0"/>
                 <a:ea typeface="Calibri" pitchFamily="34" charset="-122"/>

--- a/informes/Presentacion_Modelo_Arriendo_Club_Leones_Z144.pptx
+++ b/informes/Presentacion_Modelo_Arriendo_Club_Leones_Z144.pptx
@@ -1658,7 +1658,7 @@
     <p:bg>
       <p:bgPr>
         <a:solidFill>
-          <a:srgbClr val="001233"/>
+          <a:srgbClr val="002D55"/>
         </a:solidFill>
       </p:bgPr>
     </p:bg>
@@ -1691,7 +1691,7 @@
             <a:avLst/>
           </a:prstGeom>
           <a:solidFill>
-            <a:srgbClr val="0047AB"/>
+            <a:srgbClr val="0066B3"/>
           </a:solidFill>
           <a:ln/>
         </p:spPr>
@@ -1711,190 +1711,41 @@
             <a:avLst/>
           </a:prstGeom>
           <a:solidFill>
-            <a:srgbClr val="00338D"/>
+            <a:srgbClr val="00529B"/>
           </a:solidFill>
           <a:ln/>
         </p:spPr>
       </p:sp>
       <p:sp>
         <p:nvSpPr>
-          <p:cNvPr id="4" name="Text 2"/>
-          <p:cNvSpPr/>
-          <p:nvPr/>
-        </p:nvSpPr>
-        <p:spPr>
-          <a:xfrm>
-            <a:off x="822960" y="1554480"/>
-            <a:ext cx="9144000" cy="365760"/>
-          </a:xfrm>
-          <a:prstGeom prst="rect">
-            <a:avLst/>
-          </a:prstGeom>
-          <a:noFill/>
-          <a:ln/>
-        </p:spPr>
-        <p:txBody>
-          <a:bodyPr wrap="square" rtlCol="0" anchor="ctr"/>
-          <a:lstStyle/>
-          <a:p>
-            <a:pPr indent="0" marL="0">
-              <a:buNone/>
-            </a:pPr>
-            <a:r>
-              <a:rPr lang="en-US" sz="1500" b="1" spc="300" kern="0" dirty="0">
-                <a:solidFill>
-                  <a:srgbClr val="FDB913"/>
-                </a:solidFill>
-                <a:latin typeface="Calibri" pitchFamily="34" charset="0"/>
-                <a:ea typeface="Calibri" pitchFamily="34" charset="-122"/>
-                <a:cs typeface="Calibri" pitchFamily="34" charset="-120"/>
-              </a:rPr>
-              <a:t>CLUB DE LEONES QUINTA NORMAL</a:t>
-            </a:r>
-            <a:endParaRPr lang="en-US" sz="1500" dirty="0"/>
-          </a:p>
-        </p:txBody>
-      </p:sp>
-      <p:sp>
-        <p:nvSpPr>
-          <p:cNvPr id="5" name="Text 3"/>
-          <p:cNvSpPr/>
-          <p:nvPr/>
-        </p:nvSpPr>
-        <p:spPr>
-          <a:xfrm>
-            <a:off x="777240" y="1965960"/>
-            <a:ext cx="10058400" cy="1188720"/>
-          </a:xfrm>
-          <a:prstGeom prst="rect">
-            <a:avLst/>
-          </a:prstGeom>
-          <a:noFill/>
-          <a:ln/>
-        </p:spPr>
-        <p:txBody>
-          <a:bodyPr wrap="square" rtlCol="0" anchor="ctr"/>
-          <a:lstStyle/>
-          <a:p>
-            <a:pPr indent="0" marL="0">
-              <a:buNone/>
-            </a:pPr>
-            <a:r>
-              <a:rPr lang="en-US" sz="5400" b="1" dirty="0">
-                <a:solidFill>
-                  <a:srgbClr val="FFFFFF"/>
-                </a:solidFill>
-                <a:latin typeface="Cambria" pitchFamily="34" charset="0"/>
-                <a:ea typeface="Cambria" pitchFamily="34" charset="-122"/>
-                <a:cs typeface="Cambria" pitchFamily="34" charset="-120"/>
-              </a:rPr>
-              <a:t>Modelo de Arriendo</a:t>
-            </a:r>
-            <a:endParaRPr lang="en-US" sz="5400" dirty="0"/>
-          </a:p>
-        </p:txBody>
-      </p:sp>
-      <p:sp>
-        <p:nvSpPr>
-          <p:cNvPr id="6" name="Text 4"/>
-          <p:cNvSpPr/>
-          <p:nvPr/>
-        </p:nvSpPr>
-        <p:spPr>
-          <a:xfrm>
-            <a:off x="822960" y="3063240"/>
-            <a:ext cx="9601200" cy="548640"/>
-          </a:xfrm>
-          <a:prstGeom prst="rect">
-            <a:avLst/>
-          </a:prstGeom>
-          <a:noFill/>
-          <a:ln/>
-        </p:spPr>
-        <p:txBody>
-          <a:bodyPr wrap="square" rtlCol="0" anchor="ctr"/>
-          <a:lstStyle/>
-          <a:p>
-            <a:pPr indent="0" marL="0">
-              <a:buNone/>
-            </a:pPr>
-            <a:r>
-              <a:rPr lang="en-US" sz="2200" dirty="0">
-                <a:solidFill>
-                  <a:srgbClr val="FFF6DF"/>
-                </a:solidFill>
-                <a:latin typeface="Calibri" pitchFamily="34" charset="0"/>
-                <a:ea typeface="Calibri" pitchFamily="34" charset="-122"/>
-                <a:cs typeface="Calibri" pitchFamily="34" charset="-120"/>
-              </a:rPr>
-              <a:t>Plan piloto de 90 días — Dependencias Z-144</a:t>
-            </a:r>
-            <a:endParaRPr lang="en-US" sz="2200" dirty="0"/>
-          </a:p>
-        </p:txBody>
-      </p:sp>
-      <p:sp>
-        <p:nvSpPr>
-          <p:cNvPr id="7" name="Text 5"/>
-          <p:cNvSpPr/>
-          <p:nvPr/>
-        </p:nvSpPr>
-        <p:spPr>
-          <a:xfrm>
-            <a:off x="822960" y="3566160"/>
-            <a:ext cx="9144000" cy="365760"/>
-          </a:xfrm>
-          <a:prstGeom prst="rect">
-            <a:avLst/>
-          </a:prstGeom>
-          <a:noFill/>
-          <a:ln/>
-        </p:spPr>
-        <p:txBody>
-          <a:bodyPr wrap="square" rtlCol="0" anchor="ctr"/>
-          <a:lstStyle/>
-          <a:p>
-            <a:pPr indent="0" marL="0">
-              <a:buNone/>
-            </a:pPr>
-            <a:r>
-              <a:rPr lang="en-US" sz="1500" i="1" dirty="0">
-                <a:solidFill>
-                  <a:srgbClr val="C9BEDD"/>
-                </a:solidFill>
-                <a:latin typeface="Calibri" pitchFamily="34" charset="0"/>
-                <a:ea typeface="Calibri" pitchFamily="34" charset="-122"/>
-                <a:cs typeface="Calibri" pitchFamily="34" charset="-120"/>
-              </a:rPr>
-              <a:t>Sede "Leones en Acción"</a:t>
-            </a:r>
-            <a:endParaRPr lang="en-US" sz="1500" dirty="0"/>
-          </a:p>
-        </p:txBody>
-      </p:sp>
-      <p:sp>
-        <p:nvSpPr>
-          <p:cNvPr id="8" name="Shape 6"/>
-          <p:cNvSpPr/>
-          <p:nvPr/>
-        </p:nvSpPr>
-        <p:spPr>
-          <a:xfrm>
-            <a:off x="822960" y="4846320"/>
-            <a:ext cx="457200" cy="457200"/>
+          <p:cNvPr id="4" name="Shape 2"/>
+          <p:cNvSpPr/>
+          <p:nvPr/>
+        </p:nvSpPr>
+        <p:spPr>
+          <a:xfrm>
+            <a:off x="9528048" y="365760"/>
+            <a:ext cx="1508760" cy="1508760"/>
           </a:xfrm>
           <a:prstGeom prst="ellipse">
             <a:avLst/>
           </a:prstGeom>
           <a:solidFill>
-            <a:srgbClr val="FDB913"/>
+            <a:srgbClr val="FFFFFF"/>
           </a:solidFill>
           <a:ln/>
+          <a:effectLst>
+            <a:outerShdw sx="100000" sy="100000" kx="0" ky="0" algn="bl" rotWithShape="0" blurRad="127000" dist="38100" dir="5400000">
+              <a:srgbClr val="000000">
+                <a:alpha val="30000"/>
+              </a:srgbClr>
+            </a:outerShdw>
+          </a:effectLst>
         </p:spPr>
       </p:sp>
       <p:pic>
         <p:nvPicPr>
-          <p:cNvPr id="9" name="Image 0" descr="/tmp/claude-0/-home-user-claude/0923df48-5d83-51f5-979f-5e84a3f1a801/scratchpad/ppt/icons/handshake.png">    </p:cNvPr>
+          <p:cNvPr id="5" name="Image 0" descr="/root/.claude/skills/marca-club-leones/assets/logo-leones-en-accion.jpeg">    </p:cNvPr>
           <p:cNvPicPr>
             <a:picLocks noChangeAspect="1"/>
           </p:cNvPicPr>
@@ -1908,6 +1759,206 @@
         </p:blipFill>
         <p:spPr>
           <a:xfrm>
+            <a:off x="9619488" y="457200"/>
+            <a:ext cx="1325880" cy="1313078"/>
+          </a:xfrm>
+          <a:prstGeom prst="rect">
+            <a:avLst/>
+          </a:prstGeom>
+        </p:spPr>
+      </p:pic>
+      <p:sp>
+        <p:nvSpPr>
+          <p:cNvPr id="6" name="Text 3"/>
+          <p:cNvSpPr/>
+          <p:nvPr/>
+        </p:nvSpPr>
+        <p:spPr>
+          <a:xfrm>
+            <a:off x="822960" y="1554480"/>
+            <a:ext cx="9144000" cy="365760"/>
+          </a:xfrm>
+          <a:prstGeom prst="rect">
+            <a:avLst/>
+          </a:prstGeom>
+          <a:noFill/>
+          <a:ln/>
+        </p:spPr>
+        <p:txBody>
+          <a:bodyPr wrap="square" rtlCol="0" anchor="ctr"/>
+          <a:lstStyle/>
+          <a:p>
+            <a:pPr indent="0" marL="0">
+              <a:buNone/>
+            </a:pPr>
+            <a:r>
+              <a:rPr lang="en-US" sz="1500" b="1" spc="300" kern="0" dirty="0">
+                <a:solidFill>
+                  <a:srgbClr val="FFCF00"/>
+                </a:solidFill>
+                <a:latin typeface="Calibri" pitchFamily="34" charset="0"/>
+                <a:ea typeface="Calibri" pitchFamily="34" charset="-122"/>
+                <a:cs typeface="Calibri" pitchFamily="34" charset="-120"/>
+              </a:rPr>
+              <a:t>CLUB DE LEONES QUINTA NORMAL</a:t>
+            </a:r>
+            <a:endParaRPr lang="en-US" sz="1500" dirty="0"/>
+          </a:p>
+        </p:txBody>
+      </p:sp>
+      <p:sp>
+        <p:nvSpPr>
+          <p:cNvPr id="7" name="Text 4"/>
+          <p:cNvSpPr/>
+          <p:nvPr/>
+        </p:nvSpPr>
+        <p:spPr>
+          <a:xfrm>
+            <a:off x="777240" y="1965960"/>
+            <a:ext cx="10058400" cy="1188720"/>
+          </a:xfrm>
+          <a:prstGeom prst="rect">
+            <a:avLst/>
+          </a:prstGeom>
+          <a:noFill/>
+          <a:ln/>
+        </p:spPr>
+        <p:txBody>
+          <a:bodyPr wrap="square" rtlCol="0" anchor="ctr"/>
+          <a:lstStyle/>
+          <a:p>
+            <a:pPr indent="0" marL="0">
+              <a:buNone/>
+            </a:pPr>
+            <a:r>
+              <a:rPr lang="en-US" sz="5400" b="1" dirty="0">
+                <a:solidFill>
+                  <a:srgbClr val="FFFFFF"/>
+                </a:solidFill>
+                <a:latin typeface="Cambria" pitchFamily="34" charset="0"/>
+                <a:ea typeface="Cambria" pitchFamily="34" charset="-122"/>
+                <a:cs typeface="Cambria" pitchFamily="34" charset="-120"/>
+              </a:rPr>
+              <a:t>Modelo de Arriendo</a:t>
+            </a:r>
+            <a:endParaRPr lang="en-US" sz="5400" dirty="0"/>
+          </a:p>
+        </p:txBody>
+      </p:sp>
+      <p:sp>
+        <p:nvSpPr>
+          <p:cNvPr id="8" name="Text 5"/>
+          <p:cNvSpPr/>
+          <p:nvPr/>
+        </p:nvSpPr>
+        <p:spPr>
+          <a:xfrm>
+            <a:off x="822960" y="3063240"/>
+            <a:ext cx="9601200" cy="548640"/>
+          </a:xfrm>
+          <a:prstGeom prst="rect">
+            <a:avLst/>
+          </a:prstGeom>
+          <a:noFill/>
+          <a:ln/>
+        </p:spPr>
+        <p:txBody>
+          <a:bodyPr wrap="square" rtlCol="0" anchor="ctr"/>
+          <a:lstStyle/>
+          <a:p>
+            <a:pPr indent="0" marL="0">
+              <a:buNone/>
+            </a:pPr>
+            <a:r>
+              <a:rPr lang="en-US" sz="2200" dirty="0">
+                <a:solidFill>
+                  <a:srgbClr val="FFF7DD"/>
+                </a:solidFill>
+                <a:latin typeface="Calibri" pitchFamily="34" charset="0"/>
+                <a:ea typeface="Calibri" pitchFamily="34" charset="-122"/>
+                <a:cs typeface="Calibri" pitchFamily="34" charset="-120"/>
+              </a:rPr>
+              <a:t>Plan piloto de 90 días — Dependencias Z-144</a:t>
+            </a:r>
+            <a:endParaRPr lang="en-US" sz="2200" dirty="0"/>
+          </a:p>
+        </p:txBody>
+      </p:sp>
+      <p:sp>
+        <p:nvSpPr>
+          <p:cNvPr id="9" name="Text 6"/>
+          <p:cNvSpPr/>
+          <p:nvPr/>
+        </p:nvSpPr>
+        <p:spPr>
+          <a:xfrm>
+            <a:off x="822960" y="3566160"/>
+            <a:ext cx="9144000" cy="365760"/>
+          </a:xfrm>
+          <a:prstGeom prst="rect">
+            <a:avLst/>
+          </a:prstGeom>
+          <a:noFill/>
+          <a:ln/>
+        </p:spPr>
+        <p:txBody>
+          <a:bodyPr wrap="square" rtlCol="0" anchor="ctr"/>
+          <a:lstStyle/>
+          <a:p>
+            <a:pPr indent="0" marL="0">
+              <a:buNone/>
+            </a:pPr>
+            <a:r>
+              <a:rPr lang="en-US" sz="1500" i="1" dirty="0">
+                <a:solidFill>
+                  <a:srgbClr val="C9BEDD"/>
+                </a:solidFill>
+                <a:latin typeface="Calibri" pitchFamily="34" charset="0"/>
+                <a:ea typeface="Calibri" pitchFamily="34" charset="-122"/>
+                <a:cs typeface="Calibri" pitchFamily="34" charset="-120"/>
+              </a:rPr>
+              <a:t>Sede "Leones en Acción"</a:t>
+            </a:r>
+            <a:endParaRPr lang="en-US" sz="1500" dirty="0"/>
+          </a:p>
+        </p:txBody>
+      </p:sp>
+      <p:sp>
+        <p:nvSpPr>
+          <p:cNvPr id="10" name="Shape 7"/>
+          <p:cNvSpPr/>
+          <p:nvPr/>
+        </p:nvSpPr>
+        <p:spPr>
+          <a:xfrm>
+            <a:off x="822960" y="4846320"/>
+            <a:ext cx="457200" cy="457200"/>
+          </a:xfrm>
+          <a:prstGeom prst="ellipse">
+            <a:avLst/>
+          </a:prstGeom>
+          <a:solidFill>
+            <a:srgbClr val="FFCF00"/>
+          </a:solidFill>
+          <a:ln/>
+        </p:spPr>
+      </p:sp>
+      <p:pic>
+        <p:nvPicPr>
+          <p:cNvPr id="11" name="Image 1" descr="/tmp/claude-0/-home-user-claude/0923df48-5d83-51f5-979f-5e84a3f1a801/scratchpad/ppt/icons/handshake.png">    </p:cNvPr>
+          <p:cNvPicPr>
+            <a:picLocks noChangeAspect="1"/>
+          </p:cNvPicPr>
+          <p:nvPr/>
+        </p:nvPicPr>
+        <p:blipFill>
+          <a:blip r:embed="rId2"/>
+          <a:stretch>
+            <a:fillRect/>
+          </a:stretch>
+        </p:blipFill>
+        <p:spPr>
+          <a:xfrm>
             <a:off x="969264" y="4992624"/>
             <a:ext cx="164592" cy="164592"/>
           </a:xfrm>
@@ -1918,7 +1969,7 @@
       </p:pic>
       <p:sp>
         <p:nvSpPr>
-          <p:cNvPr id="10" name="Text 7"/>
+          <p:cNvPr id="12" name="Text 8"/>
           <p:cNvSpPr/>
           <p:nvPr/>
         </p:nvSpPr>
@@ -1969,7 +2020,7 @@
     <p:bg>
       <p:bgPr>
         <a:solidFill>
-          <a:srgbClr val="001233"/>
+          <a:srgbClr val="002D55"/>
         </a:solidFill>
       </p:bgPr>
     </p:bg>
@@ -2002,7 +2053,7 @@
             <a:avLst/>
           </a:prstGeom>
           <a:solidFill>
-            <a:srgbClr val="0047AB"/>
+            <a:srgbClr val="0066B3"/>
           </a:solidFill>
           <a:ln/>
         </p:spPr>
@@ -2022,7 +2073,7 @@
             <a:avLst/>
           </a:prstGeom>
           <a:solidFill>
-            <a:srgbClr val="FDB913"/>
+            <a:srgbClr val="FFCF00"/>
           </a:solidFill>
           <a:ln/>
         </p:spPr>
@@ -2120,7 +2171,7 @@
             <a:r>
               <a:rPr lang="en-US" sz="1700" dirty="0">
                 <a:solidFill>
-                  <a:srgbClr val="FFF6DF"/>
+                  <a:srgbClr val="FFF7DD"/>
                 </a:solidFill>
                 <a:latin typeface="Calibri" pitchFamily="34" charset="0"/>
                 <a:ea typeface="Calibri" pitchFamily="34" charset="-122"/>
@@ -2147,7 +2198,7 @@
             <a:avLst/>
           </a:prstGeom>
           <a:solidFill>
-            <a:srgbClr val="0047AB"/>
+            <a:srgbClr val="0066B3"/>
           </a:solidFill>
           <a:ln/>
         </p:spPr>
@@ -2230,7 +2281,7 @@
             <a:avLst/>
           </a:prstGeom>
           <a:solidFill>
-            <a:srgbClr val="0047AB"/>
+            <a:srgbClr val="0066B3"/>
           </a:solidFill>
           <a:ln/>
         </p:spPr>
@@ -2313,7 +2364,7 @@
             <a:avLst/>
           </a:prstGeom>
           <a:solidFill>
-            <a:srgbClr val="0047AB"/>
+            <a:srgbClr val="0066B3"/>
           </a:solidFill>
           <a:ln/>
         </p:spPr>
@@ -2396,7 +2447,7 @@
             <a:avLst/>
           </a:prstGeom>
           <a:solidFill>
-            <a:srgbClr val="0047AB"/>
+            <a:srgbClr val="0066B3"/>
           </a:solidFill>
           <a:ln/>
         </p:spPr>
@@ -2562,7 +2613,7 @@
             <a:r>
               <a:rPr lang="en-US" sz="1300" b="1" spc="200" kern="0" dirty="0">
                 <a:solidFill>
-                  <a:srgbClr val="FDB913"/>
+                  <a:srgbClr val="8C7200"/>
                 </a:solidFill>
                 <a:latin typeface="Calibri" pitchFamily="34" charset="0"/>
                 <a:ea typeface="Calibri" pitchFamily="34" charset="-122"/>
@@ -2601,7 +2652,7 @@
             <a:r>
               <a:rPr lang="en-US" sz="3000" b="1" dirty="0">
                 <a:solidFill>
-                  <a:srgbClr val="001233"/>
+                  <a:srgbClr val="002D55"/>
                 </a:solidFill>
                 <a:latin typeface="Cambria" pitchFamily="34" charset="0"/>
                 <a:ea typeface="Cambria" pitchFamily="34" charset="-122"/>
@@ -2685,7 +2736,7 @@
             <a:r>
               <a:rPr lang="en-US" sz="1600" b="1" dirty="0">
                 <a:solidFill>
-                  <a:srgbClr val="001233"/>
+                  <a:srgbClr val="002D55"/>
                 </a:solidFill>
                 <a:latin typeface="Calibri" pitchFamily="34" charset="0"/>
                 <a:ea typeface="Calibri" pitchFamily="34" charset="-122"/>
@@ -2731,7 +2782,7 @@
             </a:avLst>
           </a:prstGeom>
           <a:solidFill>
-            <a:srgbClr val="E9F0FA"/>
+            <a:srgbClr val="E8F0F8"/>
           </a:solidFill>
           <a:ln/>
           <a:effectLst>
@@ -2758,7 +2809,7 @@
             <a:avLst/>
           </a:prstGeom>
           <a:solidFill>
-            <a:srgbClr val="00338D"/>
+            <a:srgbClr val="00529B"/>
           </a:solidFill>
           <a:ln/>
         </p:spPr>
@@ -2814,7 +2865,7 @@
             <a:r>
               <a:rPr lang="en-US" sz="1600" b="1" dirty="0">
                 <a:solidFill>
-                  <a:srgbClr val="001233"/>
+                  <a:srgbClr val="002D55"/>
                 </a:solidFill>
                 <a:latin typeface="Calibri" pitchFamily="34" charset="0"/>
                 <a:ea typeface="Calibri" pitchFamily="34" charset="-122"/>
@@ -2853,7 +2904,7 @@
             <a:r>
               <a:rPr lang="en-US" sz="4000" b="1" dirty="0">
                 <a:solidFill>
-                  <a:srgbClr val="001233"/>
+                  <a:srgbClr val="002D55"/>
                 </a:solidFill>
                 <a:latin typeface="Cambria" pitchFamily="34" charset="0"/>
                 <a:ea typeface="Cambria" pitchFamily="34" charset="-122"/>
@@ -3080,7 +3131,7 @@
             <a:r>
               <a:rPr lang="en-US" sz="1300" b="1" spc="200" kern="0" dirty="0">
                 <a:solidFill>
-                  <a:srgbClr val="FDB913"/>
+                  <a:srgbClr val="8C7200"/>
                 </a:solidFill>
                 <a:latin typeface="Calibri" pitchFamily="34" charset="0"/>
                 <a:ea typeface="Calibri" pitchFamily="34" charset="-122"/>
@@ -3119,7 +3170,7 @@
             <a:r>
               <a:rPr lang="en-US" sz="3000" b="1" dirty="0">
                 <a:solidFill>
-                  <a:srgbClr val="001233"/>
+                  <a:srgbClr val="002D55"/>
                 </a:solidFill>
                 <a:latin typeface="Cambria" pitchFamily="34" charset="0"/>
                 <a:ea typeface="Cambria" pitchFamily="34" charset="-122"/>
@@ -3148,7 +3199,7 @@
             </a:avLst>
           </a:prstGeom>
           <a:solidFill>
-            <a:srgbClr val="00338D"/>
+            <a:srgbClr val="00529B"/>
           </a:solidFill>
           <a:ln/>
         </p:spPr>
@@ -3168,7 +3219,7 @@
             <a:avLst/>
           </a:prstGeom>
           <a:solidFill>
-            <a:srgbClr val="FDB913"/>
+            <a:srgbClr val="FFCF00"/>
           </a:solidFill>
           <a:ln/>
         </p:spPr>
@@ -3256,7 +3307,7 @@
             </a:avLst>
           </a:prstGeom>
           <a:solidFill>
-            <a:srgbClr val="E9F0FA"/>
+            <a:srgbClr val="E8F0F8"/>
           </a:solidFill>
           <a:ln/>
         </p:spPr>
@@ -3288,7 +3339,7 @@
             <a:r>
               <a:rPr lang="en-US" sz="3200" b="1" dirty="0">
                 <a:solidFill>
-                  <a:srgbClr val="001233"/>
+                  <a:srgbClr val="002D55"/>
                 </a:solidFill>
                 <a:latin typeface="Cambria" pitchFamily="34" charset="0"/>
                 <a:ea typeface="Cambria" pitchFamily="34" charset="-122"/>
@@ -3356,7 +3407,7 @@
             </a:avLst>
           </a:prstGeom>
           <a:solidFill>
-            <a:srgbClr val="E9F0FA"/>
+            <a:srgbClr val="E8F0F8"/>
           </a:solidFill>
           <a:ln/>
         </p:spPr>
@@ -3388,7 +3439,7 @@
             <a:r>
               <a:rPr lang="en-US" sz="3200" b="1" dirty="0">
                 <a:solidFill>
-                  <a:srgbClr val="001233"/>
+                  <a:srgbClr val="002D55"/>
                 </a:solidFill>
                 <a:latin typeface="Cambria" pitchFamily="34" charset="0"/>
                 <a:ea typeface="Cambria" pitchFamily="34" charset="-122"/>
@@ -3456,7 +3507,7 @@
             </a:avLst>
           </a:prstGeom>
           <a:solidFill>
-            <a:srgbClr val="E9F0FA"/>
+            <a:srgbClr val="E8F0F8"/>
           </a:solidFill>
           <a:ln/>
         </p:spPr>
@@ -3488,7 +3539,7 @@
             <a:r>
               <a:rPr lang="en-US" sz="3200" b="1" dirty="0">
                 <a:solidFill>
-                  <a:srgbClr val="001233"/>
+                  <a:srgbClr val="002D55"/>
                 </a:solidFill>
                 <a:latin typeface="Cambria" pitchFamily="34" charset="0"/>
                 <a:ea typeface="Cambria" pitchFamily="34" charset="-122"/>
@@ -3556,7 +3607,7 @@
             </a:avLst>
           </a:prstGeom>
           <a:solidFill>
-            <a:srgbClr val="E9F0FA"/>
+            <a:srgbClr val="E8F0F8"/>
           </a:solidFill>
           <a:ln/>
         </p:spPr>
@@ -3588,7 +3639,7 @@
             <a:r>
               <a:rPr lang="en-US" sz="3200" b="1" dirty="0">
                 <a:solidFill>
-                  <a:srgbClr val="001233"/>
+                  <a:srgbClr val="002D55"/>
                 </a:solidFill>
                 <a:latin typeface="Cambria" pitchFamily="34" charset="0"/>
                 <a:ea typeface="Cambria" pitchFamily="34" charset="-122"/>
@@ -3776,7 +3827,7 @@
             <a:r>
               <a:rPr lang="en-US" sz="1300" b="1" spc="200" kern="0" dirty="0">
                 <a:solidFill>
-                  <a:srgbClr val="FDB913"/>
+                  <a:srgbClr val="8C7200"/>
                 </a:solidFill>
                 <a:latin typeface="Calibri" pitchFamily="34" charset="0"/>
                 <a:ea typeface="Calibri" pitchFamily="34" charset="-122"/>
@@ -3815,7 +3866,7 @@
             <a:r>
               <a:rPr lang="en-US" sz="3000" b="1" dirty="0">
                 <a:solidFill>
-                  <a:srgbClr val="001233"/>
+                  <a:srgbClr val="002D55"/>
                 </a:solidFill>
                 <a:latin typeface="Cambria" pitchFamily="34" charset="0"/>
                 <a:ea typeface="Cambria" pitchFamily="34" charset="-122"/>
@@ -3842,7 +3893,7 @@
             <a:avLst/>
           </a:prstGeom>
           <a:solidFill>
-            <a:srgbClr val="00338D"/>
+            <a:srgbClr val="00529B"/>
           </a:solidFill>
           <a:ln/>
         </p:spPr>
@@ -3928,7 +3979,7 @@
             <a:avLst/>
           </a:prstGeom>
           <a:solidFill>
-            <a:srgbClr val="00338D"/>
+            <a:srgbClr val="00529B"/>
           </a:solidFill>
           <a:ln/>
         </p:spPr>
@@ -4014,7 +4065,7 @@
             <a:avLst/>
           </a:prstGeom>
           <a:solidFill>
-            <a:srgbClr val="00338D"/>
+            <a:srgbClr val="00529B"/>
           </a:solidFill>
           <a:ln/>
         </p:spPr>
@@ -4100,7 +4151,7 @@
             <a:avLst/>
           </a:prstGeom>
           <a:solidFill>
-            <a:srgbClr val="00338D"/>
+            <a:srgbClr val="00529B"/>
           </a:solidFill>
           <a:ln/>
         </p:spPr>
@@ -4186,7 +4237,7 @@
             <a:avLst/>
           </a:prstGeom>
           <a:solidFill>
-            <a:srgbClr val="00338D"/>
+            <a:srgbClr val="00529B"/>
           </a:solidFill>
           <a:ln/>
         </p:spPr>
@@ -4394,7 +4445,7 @@
             <a:r>
               <a:rPr lang="en-US" sz="1300" b="1" spc="200" kern="0" dirty="0">
                 <a:solidFill>
-                  <a:srgbClr val="FDB913"/>
+                  <a:srgbClr val="8C7200"/>
                 </a:solidFill>
                 <a:latin typeface="Calibri" pitchFamily="34" charset="0"/>
                 <a:ea typeface="Calibri" pitchFamily="34" charset="-122"/>
@@ -4433,7 +4484,7 @@
             <a:r>
               <a:rPr lang="en-US" sz="3000" b="1" dirty="0">
                 <a:solidFill>
-                  <a:srgbClr val="001233"/>
+                  <a:srgbClr val="002D55"/>
                 </a:solidFill>
                 <a:latin typeface="Cambria" pitchFamily="34" charset="0"/>
                 <a:ea typeface="Cambria" pitchFamily="34" charset="-122"/>
@@ -4501,7 +4552,7 @@
             </a:avLst>
           </a:prstGeom>
           <a:solidFill>
-            <a:srgbClr val="E9F0FA"/>
+            <a:srgbClr val="E8F0F8"/>
           </a:solidFill>
           <a:ln/>
         </p:spPr>
@@ -4533,7 +4584,7 @@
             <a:r>
               <a:rPr lang="en-US" sz="1700" b="1" dirty="0">
                 <a:solidFill>
-                  <a:srgbClr val="001233"/>
+                  <a:srgbClr val="002D55"/>
                 </a:solidFill>
                 <a:latin typeface="Calibri" pitchFamily="34" charset="0"/>
                 <a:ea typeface="Calibri" pitchFamily="34" charset="-122"/>
@@ -4680,7 +4731,7 @@
             </a:avLst>
           </a:prstGeom>
           <a:solidFill>
-            <a:srgbClr val="FFF6DF"/>
+            <a:srgbClr val="FFF7DD"/>
           </a:solidFill>
           <a:ln/>
         </p:spPr>
@@ -4712,7 +4763,7 @@
             <a:r>
               <a:rPr lang="en-US" sz="1700" b="1" dirty="0">
                 <a:solidFill>
-                  <a:srgbClr val="001233"/>
+                  <a:srgbClr val="002D55"/>
                 </a:solidFill>
                 <a:latin typeface="Calibri" pitchFamily="34" charset="0"/>
                 <a:ea typeface="Calibri" pitchFamily="34" charset="-122"/>
@@ -4979,7 +5030,7 @@
             <a:r>
               <a:rPr lang="en-US" sz="1300" b="1" spc="200" kern="0" dirty="0">
                 <a:solidFill>
-                  <a:srgbClr val="FDB913"/>
+                  <a:srgbClr val="8C7200"/>
                 </a:solidFill>
                 <a:latin typeface="Calibri" pitchFamily="34" charset="0"/>
                 <a:ea typeface="Calibri" pitchFamily="34" charset="-122"/>
@@ -5018,7 +5069,7 @@
             <a:r>
               <a:rPr lang="en-US" sz="3000" b="1" dirty="0">
                 <a:solidFill>
-                  <a:srgbClr val="001233"/>
+                  <a:srgbClr val="002D55"/>
                 </a:solidFill>
                 <a:latin typeface="Cambria" pitchFamily="34" charset="0"/>
                 <a:ea typeface="Cambria" pitchFamily="34" charset="-122"/>
@@ -5124,7 +5175,7 @@
                       <a:tailEnd type="none" w="med" len="med"/>
                     </a:lnB>
                     <a:solidFill>
-                      <a:srgbClr val="00338D"/>
+                      <a:srgbClr val="00529B"/>
                     </a:solidFill>
                   </a:tcPr>
                 </a:tc>
@@ -5192,7 +5243,7 @@
                       <a:tailEnd type="none" w="med" len="med"/>
                     </a:lnB>
                     <a:solidFill>
-                      <a:srgbClr val="00338D"/>
+                      <a:srgbClr val="00529B"/>
                     </a:solidFill>
                   </a:tcPr>
                 </a:tc>
@@ -5260,7 +5311,7 @@
                       <a:tailEnd type="none" w="med" len="med"/>
                     </a:lnB>
                     <a:solidFill>
-                      <a:srgbClr val="00338D"/>
+                      <a:srgbClr val="00529B"/>
                     </a:solidFill>
                   </a:tcPr>
                 </a:tc>
@@ -5328,7 +5379,7 @@
                       <a:tailEnd type="none" w="med" len="med"/>
                     </a:lnB>
                     <a:solidFill>
-                      <a:srgbClr val="00338D"/>
+                      <a:srgbClr val="00529B"/>
                     </a:solidFill>
                   </a:tcPr>
                 </a:tc>
@@ -5396,7 +5447,7 @@
                       <a:tailEnd type="none" w="med" len="med"/>
                     </a:lnB>
                     <a:solidFill>
-                      <a:srgbClr val="00338D"/>
+                      <a:srgbClr val="00529B"/>
                     </a:solidFill>
                   </a:tcPr>
                 </a:tc>
@@ -5466,7 +5517,7 @@
                       <a:tailEnd type="none" w="med" len="med"/>
                     </a:lnB>
                     <a:solidFill>
-                      <a:srgbClr val="E9F0FA"/>
+                      <a:srgbClr val="E8F0F8"/>
                     </a:solidFill>
                   </a:tcPr>
                 </a:tc>
@@ -5534,7 +5585,7 @@
                       <a:tailEnd type="none" w="med" len="med"/>
                     </a:lnB>
                     <a:solidFill>
-                      <a:srgbClr val="E9F0FA"/>
+                      <a:srgbClr val="E8F0F8"/>
                     </a:solidFill>
                   </a:tcPr>
                 </a:tc>
@@ -5602,7 +5653,7 @@
                       <a:tailEnd type="none" w="med" len="med"/>
                     </a:lnB>
                     <a:solidFill>
-                      <a:srgbClr val="E9F0FA"/>
+                      <a:srgbClr val="E8F0F8"/>
                     </a:solidFill>
                   </a:tcPr>
                 </a:tc>
@@ -5670,7 +5721,7 @@
                       <a:tailEnd type="none" w="med" len="med"/>
                     </a:lnB>
                     <a:solidFill>
-                      <a:srgbClr val="E9F0FA"/>
+                      <a:srgbClr val="E8F0F8"/>
                     </a:solidFill>
                   </a:tcPr>
                 </a:tc>
@@ -5738,7 +5789,7 @@
                       <a:tailEnd type="none" w="med" len="med"/>
                     </a:lnB>
                     <a:solidFill>
-                      <a:srgbClr val="E9F0FA"/>
+                      <a:srgbClr val="E8F0F8"/>
                     </a:solidFill>
                   </a:tcPr>
                 </a:tc>
@@ -6150,7 +6201,7 @@
                       <a:tailEnd type="none" w="med" len="med"/>
                     </a:lnB>
                     <a:solidFill>
-                      <a:srgbClr val="E9F0FA"/>
+                      <a:srgbClr val="E8F0F8"/>
                     </a:solidFill>
                   </a:tcPr>
                 </a:tc>
@@ -6218,7 +6269,7 @@
                       <a:tailEnd type="none" w="med" len="med"/>
                     </a:lnB>
                     <a:solidFill>
-                      <a:srgbClr val="E9F0FA"/>
+                      <a:srgbClr val="E8F0F8"/>
                     </a:solidFill>
                   </a:tcPr>
                 </a:tc>
@@ -6286,7 +6337,7 @@
                       <a:tailEnd type="none" w="med" len="med"/>
                     </a:lnB>
                     <a:solidFill>
-                      <a:srgbClr val="E9F0FA"/>
+                      <a:srgbClr val="E8F0F8"/>
                     </a:solidFill>
                   </a:tcPr>
                 </a:tc>
@@ -6354,7 +6405,7 @@
                       <a:tailEnd type="none" w="med" len="med"/>
                     </a:lnB>
                     <a:solidFill>
-                      <a:srgbClr val="E9F0FA"/>
+                      <a:srgbClr val="E8F0F8"/>
                     </a:solidFill>
                   </a:tcPr>
                 </a:tc>
@@ -6422,7 +6473,7 @@
                       <a:tailEnd type="none" w="med" len="med"/>
                     </a:lnB>
                     <a:solidFill>
-                      <a:srgbClr val="E9F0FA"/>
+                      <a:srgbClr val="E8F0F8"/>
                     </a:solidFill>
                   </a:tcPr>
                 </a:tc>
@@ -6448,7 +6499,7 @@
             </a:avLst>
           </a:prstGeom>
           <a:solidFill>
-            <a:srgbClr val="FFF6DF"/>
+            <a:srgbClr val="FFF7DD"/>
           </a:solidFill>
           <a:ln/>
         </p:spPr>
@@ -6483,7 +6534,7 @@
             <a:r>
               <a:rPr lang="en-US" sz="1400" b="1" dirty="0">
                 <a:solidFill>
-                  <a:srgbClr val="001233"/>
+                  <a:srgbClr val="002D55"/>
                 </a:solidFill>
                 <a:latin typeface="Calibri" pitchFamily="34" charset="0"/>
                 <a:ea typeface="Calibri" pitchFamily="34" charset="-122"/>
@@ -6688,7 +6739,7 @@
             <a:r>
               <a:rPr lang="en-US" sz="1300" b="1" spc="200" kern="0" dirty="0">
                 <a:solidFill>
-                  <a:srgbClr val="FDB913"/>
+                  <a:srgbClr val="8C7200"/>
                 </a:solidFill>
                 <a:latin typeface="Calibri" pitchFamily="34" charset="0"/>
                 <a:ea typeface="Calibri" pitchFamily="34" charset="-122"/>
@@ -6727,7 +6778,7 @@
             <a:r>
               <a:rPr lang="en-US" sz="3000" b="1" dirty="0">
                 <a:solidFill>
-                  <a:srgbClr val="001233"/>
+                  <a:srgbClr val="002D55"/>
                 </a:solidFill>
                 <a:latin typeface="Cambria" pitchFamily="34" charset="0"/>
                 <a:ea typeface="Cambria" pitchFamily="34" charset="-122"/>
@@ -6756,7 +6807,7 @@
             </a:avLst>
           </a:prstGeom>
           <a:solidFill>
-            <a:srgbClr val="E9F0FA"/>
+            <a:srgbClr val="E8F0F8"/>
           </a:solidFill>
           <a:ln/>
         </p:spPr>
@@ -6776,7 +6827,7 @@
             <a:avLst/>
           </a:prstGeom>
           <a:solidFill>
-            <a:srgbClr val="00338D"/>
+            <a:srgbClr val="00529B"/>
           </a:solidFill>
           <a:ln/>
         </p:spPr>
@@ -6832,7 +6883,7 @@
             <a:r>
               <a:rPr lang="en-US" sz="1700" b="1" dirty="0">
                 <a:solidFill>
-                  <a:srgbClr val="001233"/>
+                  <a:srgbClr val="002D55"/>
                 </a:solidFill>
                 <a:latin typeface="Calibri" pitchFamily="34" charset="0"/>
                 <a:ea typeface="Calibri" pitchFamily="34" charset="-122"/>
@@ -6943,7 +6994,7 @@
             </a:avLst>
           </a:prstGeom>
           <a:solidFill>
-            <a:srgbClr val="E9F0FA"/>
+            <a:srgbClr val="E8F0F8"/>
           </a:solidFill>
           <a:ln/>
         </p:spPr>
@@ -6963,7 +7014,7 @@
             <a:avLst/>
           </a:prstGeom>
           <a:solidFill>
-            <a:srgbClr val="00338D"/>
+            <a:srgbClr val="00529B"/>
           </a:solidFill>
           <a:ln/>
         </p:spPr>
@@ -7019,7 +7070,7 @@
             <a:r>
               <a:rPr lang="en-US" sz="1700" b="1" dirty="0">
                 <a:solidFill>
-                  <a:srgbClr val="001233"/>
+                  <a:srgbClr val="002D55"/>
                 </a:solidFill>
                 <a:latin typeface="Calibri" pitchFamily="34" charset="0"/>
                 <a:ea typeface="Calibri" pitchFamily="34" charset="-122"/>
@@ -7130,7 +7181,7 @@
             </a:avLst>
           </a:prstGeom>
           <a:solidFill>
-            <a:srgbClr val="E9F0FA"/>
+            <a:srgbClr val="E8F0F8"/>
           </a:solidFill>
           <a:ln/>
         </p:spPr>
@@ -7150,7 +7201,7 @@
             <a:avLst/>
           </a:prstGeom>
           <a:solidFill>
-            <a:srgbClr val="00338D"/>
+            <a:srgbClr val="00529B"/>
           </a:solidFill>
           <a:ln/>
         </p:spPr>
@@ -7206,7 +7257,7 @@
             <a:r>
               <a:rPr lang="en-US" sz="1700" b="1" dirty="0">
                 <a:solidFill>
-                  <a:srgbClr val="001233"/>
+                  <a:srgbClr val="002D55"/>
                 </a:solidFill>
                 <a:latin typeface="Calibri" pitchFamily="34" charset="0"/>
                 <a:ea typeface="Calibri" pitchFamily="34" charset="-122"/>
@@ -7437,7 +7488,7 @@
             <a:r>
               <a:rPr lang="en-US" sz="1300" b="1" spc="200" kern="0" dirty="0">
                 <a:solidFill>
-                  <a:srgbClr val="FDB913"/>
+                  <a:srgbClr val="8C7200"/>
                 </a:solidFill>
                 <a:latin typeface="Calibri" pitchFamily="34" charset="0"/>
                 <a:ea typeface="Calibri" pitchFamily="34" charset="-122"/>
@@ -7476,7 +7527,7 @@
             <a:r>
               <a:rPr lang="en-US" sz="3000" b="1" dirty="0">
                 <a:solidFill>
-                  <a:srgbClr val="001233"/>
+                  <a:srgbClr val="002D55"/>
                 </a:solidFill>
                 <a:latin typeface="Cambria" pitchFamily="34" charset="0"/>
                 <a:ea typeface="Cambria" pitchFamily="34" charset="-122"/>
@@ -7618,7 +7669,7 @@
                       <a:tailEnd type="none" w="med" len="med"/>
                     </a:lnB>
                     <a:solidFill>
-                      <a:srgbClr val="00338D"/>
+                      <a:srgbClr val="00529B"/>
                     </a:solidFill>
                   </a:tcPr>
                 </a:tc>
@@ -7686,7 +7737,7 @@
                       <a:tailEnd type="none" w="med" len="med"/>
                     </a:lnB>
                     <a:solidFill>
-                      <a:srgbClr val="00338D"/>
+                      <a:srgbClr val="00529B"/>
                     </a:solidFill>
                   </a:tcPr>
                 </a:tc>
@@ -7756,7 +7807,7 @@
                       <a:tailEnd type="none" w="med" len="med"/>
                     </a:lnB>
                     <a:solidFill>
-                      <a:srgbClr val="E9F0FA"/>
+                      <a:srgbClr val="E8F0F8"/>
                     </a:solidFill>
                   </a:tcPr>
                 </a:tc>
@@ -7824,7 +7875,7 @@
                       <a:tailEnd type="none" w="med" len="med"/>
                     </a:lnB>
                     <a:solidFill>
-                      <a:srgbClr val="E9F0FA"/>
+                      <a:srgbClr val="E8F0F8"/>
                     </a:solidFill>
                   </a:tcPr>
                 </a:tc>
@@ -8032,7 +8083,7 @@
                       <a:tailEnd type="none" w="med" len="med"/>
                     </a:lnB>
                     <a:solidFill>
-                      <a:srgbClr val="E9F0FA"/>
+                      <a:srgbClr val="E8F0F8"/>
                     </a:solidFill>
                   </a:tcPr>
                 </a:tc>
@@ -8100,7 +8151,7 @@
                       <a:tailEnd type="none" w="med" len="med"/>
                     </a:lnB>
                     <a:solidFill>
-                      <a:srgbClr val="E9F0FA"/>
+                      <a:srgbClr val="E8F0F8"/>
                     </a:solidFill>
                   </a:tcPr>
                 </a:tc>
@@ -8308,7 +8359,7 @@
                       <a:tailEnd type="none" w="med" len="med"/>
                     </a:lnB>
                     <a:solidFill>
-                      <a:srgbClr val="E9F0FA"/>
+                      <a:srgbClr val="E8F0F8"/>
                     </a:solidFill>
                   </a:tcPr>
                 </a:tc>
@@ -8376,7 +8427,7 @@
                       <a:tailEnd type="none" w="med" len="med"/>
                     </a:lnB>
                     <a:solidFill>
-                      <a:srgbClr val="E9F0FA"/>
+                      <a:srgbClr val="E8F0F8"/>
                     </a:solidFill>
                   </a:tcPr>
                 </a:tc>
@@ -8660,7 +8711,7 @@
             <a:r>
               <a:rPr lang="en-US" sz="1300" b="1" spc="200" kern="0" dirty="0">
                 <a:solidFill>
-                  <a:srgbClr val="FDB913"/>
+                  <a:srgbClr val="8C7200"/>
                 </a:solidFill>
                 <a:latin typeface="Calibri" pitchFamily="34" charset="0"/>
                 <a:ea typeface="Calibri" pitchFamily="34" charset="-122"/>
@@ -8699,7 +8750,7 @@
             <a:r>
               <a:rPr lang="en-US" sz="3000" b="1" dirty="0">
                 <a:solidFill>
-                  <a:srgbClr val="001233"/>
+                  <a:srgbClr val="002D55"/>
                 </a:solidFill>
                 <a:latin typeface="Cambria" pitchFamily="34" charset="0"/>
                 <a:ea typeface="Cambria" pitchFamily="34" charset="-122"/>
@@ -8728,7 +8779,7 @@
           <a:noFill/>
           <a:ln w="31750">
             <a:solidFill>
-              <a:srgbClr val="FDB913"/>
+              <a:srgbClr val="FFCF00"/>
             </a:solidFill>
             <a:prstDash val="dash"/>
           </a:ln>
@@ -8749,7 +8800,7 @@
             <a:avLst/>
           </a:prstGeom>
           <a:solidFill>
-            <a:srgbClr val="00338D"/>
+            <a:srgbClr val="00529B"/>
           </a:solidFill>
           <a:ln w="25400">
             <a:solidFill>
@@ -8815,7 +8866,7 @@
             </a:avLst>
           </a:prstGeom>
           <a:solidFill>
-            <a:srgbClr val="E9F0FA"/>
+            <a:srgbClr val="E8F0F8"/>
           </a:solidFill>
           <a:ln/>
         </p:spPr>
@@ -8847,7 +8898,7 @@
             <a:r>
               <a:rPr lang="en-US" sz="1200" b="1" dirty="0">
                 <a:solidFill>
-                  <a:srgbClr val="B8860B"/>
+                  <a:srgbClr val="8C7200"/>
                 </a:solidFill>
                 <a:latin typeface="Calibri" pitchFamily="34" charset="0"/>
                 <a:ea typeface="Calibri" pitchFamily="34" charset="-122"/>
@@ -8886,7 +8937,7 @@
             <a:r>
               <a:rPr lang="en-US" sz="1600" b="1" dirty="0">
                 <a:solidFill>
-                  <a:srgbClr val="001233"/>
+                  <a:srgbClr val="002D55"/>
                 </a:solidFill>
                 <a:latin typeface="Calibri" pitchFamily="34" charset="0"/>
                 <a:ea typeface="Calibri" pitchFamily="34" charset="-122"/>
@@ -8952,7 +9003,7 @@
             <a:avLst/>
           </a:prstGeom>
           <a:solidFill>
-            <a:srgbClr val="00338D"/>
+            <a:srgbClr val="00529B"/>
           </a:solidFill>
           <a:ln w="25400">
             <a:solidFill>
@@ -9018,7 +9069,7 @@
             </a:avLst>
           </a:prstGeom>
           <a:solidFill>
-            <a:srgbClr val="E9F0FA"/>
+            <a:srgbClr val="E8F0F8"/>
           </a:solidFill>
           <a:ln/>
         </p:spPr>
@@ -9050,7 +9101,7 @@
             <a:r>
               <a:rPr lang="en-US" sz="1200" b="1" dirty="0">
                 <a:solidFill>
-                  <a:srgbClr val="B8860B"/>
+                  <a:srgbClr val="8C7200"/>
                 </a:solidFill>
                 <a:latin typeface="Calibri" pitchFamily="34" charset="0"/>
                 <a:ea typeface="Calibri" pitchFamily="34" charset="-122"/>
@@ -9089,7 +9140,7 @@
             <a:r>
               <a:rPr lang="en-US" sz="1600" b="1" dirty="0">
                 <a:solidFill>
-                  <a:srgbClr val="001233"/>
+                  <a:srgbClr val="002D55"/>
                 </a:solidFill>
                 <a:latin typeface="Calibri" pitchFamily="34" charset="0"/>
                 <a:ea typeface="Calibri" pitchFamily="34" charset="-122"/>
@@ -9155,7 +9206,7 @@
             <a:avLst/>
           </a:prstGeom>
           <a:solidFill>
-            <a:srgbClr val="00338D"/>
+            <a:srgbClr val="00529B"/>
           </a:solidFill>
           <a:ln w="25400">
             <a:solidFill>
@@ -9221,7 +9272,7 @@
             </a:avLst>
           </a:prstGeom>
           <a:solidFill>
-            <a:srgbClr val="E9F0FA"/>
+            <a:srgbClr val="E8F0F8"/>
           </a:solidFill>
           <a:ln/>
         </p:spPr>
@@ -9253,7 +9304,7 @@
             <a:r>
               <a:rPr lang="en-US" sz="1200" b="1" dirty="0">
                 <a:solidFill>
-                  <a:srgbClr val="B8860B"/>
+                  <a:srgbClr val="8C7200"/>
                 </a:solidFill>
                 <a:latin typeface="Calibri" pitchFamily="34" charset="0"/>
                 <a:ea typeface="Calibri" pitchFamily="34" charset="-122"/>
@@ -9292,7 +9343,7 @@
             <a:r>
               <a:rPr lang="en-US" sz="1600" b="1" dirty="0">
                 <a:solidFill>
-                  <a:srgbClr val="001233"/>
+                  <a:srgbClr val="002D55"/>
                 </a:solidFill>
                 <a:latin typeface="Calibri" pitchFamily="34" charset="0"/>
                 <a:ea typeface="Calibri" pitchFamily="34" charset="-122"/>
@@ -9358,7 +9409,7 @@
             <a:avLst/>
           </a:prstGeom>
           <a:solidFill>
-            <a:srgbClr val="00338D"/>
+            <a:srgbClr val="00529B"/>
           </a:solidFill>
           <a:ln w="25400">
             <a:solidFill>
@@ -9424,7 +9475,7 @@
             </a:avLst>
           </a:prstGeom>
           <a:solidFill>
-            <a:srgbClr val="E9F0FA"/>
+            <a:srgbClr val="E8F0F8"/>
           </a:solidFill>
           <a:ln/>
         </p:spPr>
@@ -9456,7 +9507,7 @@
             <a:r>
               <a:rPr lang="en-US" sz="1200" b="1" dirty="0">
                 <a:solidFill>
-                  <a:srgbClr val="B8860B"/>
+                  <a:srgbClr val="8C7200"/>
                 </a:solidFill>
                 <a:latin typeface="Calibri" pitchFamily="34" charset="0"/>
                 <a:ea typeface="Calibri" pitchFamily="34" charset="-122"/>
@@ -9495,7 +9546,7 @@
             <a:r>
               <a:rPr lang="en-US" sz="1600" b="1" dirty="0">
                 <a:solidFill>
-                  <a:srgbClr val="001233"/>
+                  <a:srgbClr val="002D55"/>
                 </a:solidFill>
                 <a:latin typeface="Calibri" pitchFamily="34" charset="0"/>
                 <a:ea typeface="Calibri" pitchFamily="34" charset="-122"/>
@@ -9573,7 +9624,7 @@
             <a:r>
               <a:rPr lang="en-US" sz="1600" b="1" dirty="0">
                 <a:solidFill>
-                  <a:srgbClr val="001233"/>
+                  <a:srgbClr val="002D55"/>
                 </a:solidFill>
                 <a:latin typeface="Calibri" pitchFamily="34" charset="0"/>
                 <a:ea typeface="Calibri" pitchFamily="34" charset="-122"/>
@@ -9600,7 +9651,7 @@
             <a:avLst/>
           </a:prstGeom>
           <a:solidFill>
-            <a:srgbClr val="00338D"/>
+            <a:srgbClr val="00529B"/>
           </a:solidFill>
           <a:ln/>
         </p:spPr>
@@ -9656,7 +9707,7 @@
             <a:r>
               <a:rPr lang="en-US" sz="1300" b="1" dirty="0">
                 <a:solidFill>
-                  <a:srgbClr val="001233"/>
+                  <a:srgbClr val="002D55"/>
                 </a:solidFill>
                 <a:latin typeface="Calibri" pitchFamily="34" charset="0"/>
                 <a:ea typeface="Calibri" pitchFamily="34" charset="-122"/>
@@ -9722,7 +9773,7 @@
             <a:avLst/>
           </a:prstGeom>
           <a:solidFill>
-            <a:srgbClr val="00338D"/>
+            <a:srgbClr val="00529B"/>
           </a:solidFill>
           <a:ln/>
         </p:spPr>
@@ -9778,7 +9829,7 @@
             <a:r>
               <a:rPr lang="en-US" sz="1300" b="1" dirty="0">
                 <a:solidFill>
-                  <a:srgbClr val="001233"/>
+                  <a:srgbClr val="002D55"/>
                 </a:solidFill>
                 <a:latin typeface="Calibri" pitchFamily="34" charset="0"/>
                 <a:ea typeface="Calibri" pitchFamily="34" charset="-122"/>
@@ -9844,7 +9895,7 @@
             <a:avLst/>
           </a:prstGeom>
           <a:solidFill>
-            <a:srgbClr val="00338D"/>
+            <a:srgbClr val="00529B"/>
           </a:solidFill>
           <a:ln/>
         </p:spPr>
@@ -9900,7 +9951,7 @@
             <a:r>
               <a:rPr lang="en-US" sz="1300" b="1" dirty="0">
                 <a:solidFill>
-                  <a:srgbClr val="001233"/>
+                  <a:srgbClr val="002D55"/>
                 </a:solidFill>
                 <a:latin typeface="Calibri" pitchFamily="34" charset="0"/>
                 <a:ea typeface="Calibri" pitchFamily="34" charset="-122"/>
@@ -9966,7 +10017,7 @@
             <a:avLst/>
           </a:prstGeom>
           <a:solidFill>
-            <a:srgbClr val="00338D"/>
+            <a:srgbClr val="00529B"/>
           </a:solidFill>
           <a:ln/>
         </p:spPr>
@@ -10022,7 +10073,7 @@
             <a:r>
               <a:rPr lang="en-US" sz="1300" b="1" dirty="0">
                 <a:solidFill>
-                  <a:srgbClr val="001233"/>
+                  <a:srgbClr val="002D55"/>
                 </a:solidFill>
                 <a:latin typeface="Calibri" pitchFamily="34" charset="0"/>
                 <a:ea typeface="Calibri" pitchFamily="34" charset="-122"/>
